--- a/branded_docs/VBX_SQ-OS_External.pptx
+++ b/branded_docs/VBX_SQ-OS_External.pptx
@@ -2383,7 +2383,7 @@
         </p:nvSpPr>
         <p:spPr>
           <a:xfrm>
-            <a:off x="640080" y="5961888"/>
+            <a:off x="640080" y="6035040"/>
             <a:ext cx="10911535" cy="274320"/>
           </a:xfrm>
           <a:prstGeom prst="rect">
